--- a/instructor/slides/pptx/lectures/L71.pptx
+++ b/instructor/slides/pptx/lectures/L71.pptx
@@ -4162,8 +4162,8 @@
         </p:nvSpPr>
         <p:spPr>
           <a:xfrm>
-            <a:off x="640080" y="1920240"/>
-            <a:ext cx="10972800" cy="1463040"/>
+            <a:off x="640080" y="1828800"/>
+            <a:ext cx="6675120" cy="1645920"/>
           </a:xfrm>
           <a:prstGeom prst="rect">
             <a:avLst/>
@@ -4177,7 +4177,7 @@
           <a:lstStyle/>
           <a:p>
             <a:r>
-              <a:rPr sz="4400" b="1">
+              <a:rPr sz="4000" b="1">
                 <a:solidFill>
                   <a:srgbClr val="FFFFFF"/>
                 </a:solidFill>
@@ -4196,8 +4196,8 @@
         </p:nvSpPr>
         <p:spPr>
           <a:xfrm>
-            <a:off x="640080" y="3657600"/>
-            <a:ext cx="10789920" cy="1097280"/>
+            <a:off x="640080" y="3794760"/>
+            <a:ext cx="6675120" cy="1097280"/>
           </a:xfrm>
           <a:prstGeom prst="rect">
             <a:avLst/>
@@ -4211,7 +4211,7 @@
           <a:lstStyle/>
           <a:p>
             <a:r>
-              <a:rPr sz="2000" b="0">
+              <a:rPr sz="1800" b="0">
                 <a:solidFill>
                   <a:srgbClr val="B7CBDE"/>
                 </a:solidFill>
@@ -4230,8 +4230,8 @@
         </p:nvSpPr>
         <p:spPr>
           <a:xfrm>
-            <a:off x="640080" y="5029200"/>
-            <a:ext cx="10972800" cy="457200"/>
+            <a:off x="640080" y="5120640"/>
+            <a:ext cx="6766560" cy="457200"/>
           </a:xfrm>
           <a:prstGeom prst="rect">
             <a:avLst/>
@@ -4245,7 +4245,7 @@
           <a:lstStyle/>
           <a:p>
             <a:r>
-              <a:rPr sz="1600" b="0">
+              <a:rPr sz="1500" b="0">
                 <a:solidFill>
                   <a:srgbClr val="3EC6FF"/>
                 </a:solidFill>
@@ -4256,6 +4256,30 @@
           </a:p>
         </p:txBody>
       </p:sp>
+      <p:pic>
+        <p:nvPicPr>
+          <p:cNvPr id="7" name="Picture 6" descr="dw-joins.jpg"/>
+          <p:cNvPicPr>
+            <a:picLocks noChangeAspect="1"/>
+          </p:cNvPicPr>
+          <p:nvPr/>
+        </p:nvPicPr>
+        <p:blipFill>
+          <a:blip r:embed="rId2"/>
+          <a:stretch>
+            <a:fillRect/>
+          </a:stretch>
+        </p:blipFill>
+        <p:spPr>
+          <a:xfrm>
+            <a:off x="7452360" y="1325880"/>
+            <a:ext cx="4160520" cy="4160520"/>
+          </a:xfrm>
+          <a:prstGeom prst="rect">
+            <a:avLst/>
+          </a:prstGeom>
+        </p:spPr>
+      </p:pic>
     </p:spTree>
   </p:cSld>
   <p:clrMapOvr>
@@ -4359,8 +4383,8 @@
         </p:nvSpPr>
         <p:spPr>
           <a:xfrm>
-            <a:off x="640080" y="685800"/>
-            <a:ext cx="10972800" cy="1463040"/>
+            <a:off x="640080" y="658368"/>
+            <a:ext cx="7863840" cy="1645920"/>
           </a:xfrm>
           <a:prstGeom prst="rect">
             <a:avLst/>
@@ -4374,7 +4398,7 @@
           <a:lstStyle/>
           <a:p>
             <a:r>
-              <a:rPr sz="3200" b="1">
+              <a:rPr sz="3000" b="1">
                 <a:solidFill>
                   <a:srgbClr val="FFFFFF"/>
                 </a:solidFill>
@@ -4393,8 +4417,8 @@
         </p:nvSpPr>
         <p:spPr>
           <a:xfrm>
-            <a:off x="777240" y="2286000"/>
-            <a:ext cx="10607040" cy="4754880"/>
+            <a:off x="777240" y="2331720"/>
+            <a:ext cx="7498079" cy="4754880"/>
           </a:xfrm>
           <a:prstGeom prst="rect">
             <a:avLst/>
@@ -4413,7 +4437,7 @@
               </a:spcAft>
             </a:pPr>
             <a:r>
-              <a:rPr sz="2400" b="0">
+              <a:rPr sz="2200" b="0">
                 <a:solidFill>
                   <a:srgbClr val="FFFFFF"/>
                 </a:solidFill>
@@ -4424,6 +4448,30 @@
           </a:p>
         </p:txBody>
       </p:sp>
+      <p:pic>
+        <p:nvPicPr>
+          <p:cNvPr id="6" name="Picture 5" descr="dw-joins.jpg"/>
+          <p:cNvPicPr>
+            <a:picLocks noChangeAspect="1"/>
+          </p:cNvPicPr>
+          <p:nvPr/>
+        </p:nvPicPr>
+        <p:blipFill>
+          <a:blip r:embed="rId2"/>
+          <a:stretch>
+            <a:fillRect/>
+          </a:stretch>
+        </p:blipFill>
+        <p:spPr>
+          <a:xfrm>
+            <a:off x="8732520" y="2057400"/>
+            <a:ext cx="2880360" cy="2880360"/>
+          </a:xfrm>
+          <a:prstGeom prst="rect">
+            <a:avLst/>
+          </a:prstGeom>
+        </p:spPr>
+      </p:pic>
     </p:spTree>
   </p:cSld>
   <p:clrMapOvr>
@@ -4527,8 +4575,8 @@
         </p:nvSpPr>
         <p:spPr>
           <a:xfrm>
-            <a:off x="640080" y="685800"/>
-            <a:ext cx="10972800" cy="1463040"/>
+            <a:off x="640080" y="658368"/>
+            <a:ext cx="7863840" cy="1645920"/>
           </a:xfrm>
           <a:prstGeom prst="rect">
             <a:avLst/>
@@ -4542,7 +4590,7 @@
           <a:lstStyle/>
           <a:p>
             <a:r>
-              <a:rPr sz="3200" b="1">
+              <a:rPr sz="3000" b="1">
                 <a:solidFill>
                   <a:srgbClr val="FFFFFF"/>
                 </a:solidFill>
@@ -4561,8 +4609,8 @@
         </p:nvSpPr>
         <p:spPr>
           <a:xfrm>
-            <a:off x="777240" y="2286000"/>
-            <a:ext cx="10607040" cy="4754880"/>
+            <a:off x="777240" y="2331720"/>
+            <a:ext cx="7498079" cy="4754880"/>
           </a:xfrm>
           <a:prstGeom prst="rect">
             <a:avLst/>
@@ -4581,7 +4629,7 @@
               </a:spcAft>
             </a:pPr>
             <a:r>
-              <a:rPr sz="2400" b="0">
+              <a:rPr sz="2200" b="0">
                 <a:solidFill>
                   <a:srgbClr val="FFFFFF"/>
                 </a:solidFill>
@@ -4592,6 +4640,30 @@
           </a:p>
         </p:txBody>
       </p:sp>
+      <p:pic>
+        <p:nvPicPr>
+          <p:cNvPr id="6" name="Picture 5" descr="dw-joins.jpg"/>
+          <p:cNvPicPr>
+            <a:picLocks noChangeAspect="1"/>
+          </p:cNvPicPr>
+          <p:nvPr/>
+        </p:nvPicPr>
+        <p:blipFill>
+          <a:blip r:embed="rId2"/>
+          <a:stretch>
+            <a:fillRect/>
+          </a:stretch>
+        </p:blipFill>
+        <p:spPr>
+          <a:xfrm>
+            <a:off x="8732520" y="2057400"/>
+            <a:ext cx="2880360" cy="2880360"/>
+          </a:xfrm>
+          <a:prstGeom prst="rect">
+            <a:avLst/>
+          </a:prstGeom>
+        </p:spPr>
+      </p:pic>
     </p:spTree>
   </p:cSld>
   <p:clrMapOvr>
@@ -4695,8 +4767,8 @@
         </p:nvSpPr>
         <p:spPr>
           <a:xfrm>
-            <a:off x="640080" y="685800"/>
-            <a:ext cx="10972800" cy="1463040"/>
+            <a:off x="640080" y="658368"/>
+            <a:ext cx="7863840" cy="1645920"/>
           </a:xfrm>
           <a:prstGeom prst="rect">
             <a:avLst/>
@@ -4710,7 +4782,7 @@
           <a:lstStyle/>
           <a:p>
             <a:r>
-              <a:rPr sz="3200" b="1">
+              <a:rPr sz="3000" b="1">
                 <a:solidFill>
                   <a:srgbClr val="FFFFFF"/>
                 </a:solidFill>
@@ -4729,8 +4801,8 @@
         </p:nvSpPr>
         <p:spPr>
           <a:xfrm>
-            <a:off x="777240" y="2286000"/>
-            <a:ext cx="10607040" cy="4754880"/>
+            <a:off x="777240" y="2331720"/>
+            <a:ext cx="7498079" cy="4754880"/>
           </a:xfrm>
           <a:prstGeom prst="rect">
             <a:avLst/>
@@ -4749,7 +4821,7 @@
               </a:spcAft>
             </a:pPr>
             <a:r>
-              <a:rPr sz="2400" b="0">
+              <a:rPr sz="2200" b="0">
                 <a:solidFill>
                   <a:srgbClr val="FFFFFF"/>
                 </a:solidFill>
@@ -4765,7 +4837,7 @@
               </a:spcAft>
             </a:pPr>
             <a:r>
-              <a:rPr sz="2400" b="0">
+              <a:rPr sz="2200" b="0">
                 <a:solidFill>
                   <a:srgbClr val="FFFFFF"/>
                 </a:solidFill>
@@ -4776,6 +4848,30 @@
           </a:p>
         </p:txBody>
       </p:sp>
+      <p:pic>
+        <p:nvPicPr>
+          <p:cNvPr id="6" name="Picture 5" descr="dw-joins.jpg"/>
+          <p:cNvPicPr>
+            <a:picLocks noChangeAspect="1"/>
+          </p:cNvPicPr>
+          <p:nvPr/>
+        </p:nvPicPr>
+        <p:blipFill>
+          <a:blip r:embed="rId2"/>
+          <a:stretch>
+            <a:fillRect/>
+          </a:stretch>
+        </p:blipFill>
+        <p:spPr>
+          <a:xfrm>
+            <a:off x="8732520" y="2057400"/>
+            <a:ext cx="2880360" cy="2880360"/>
+          </a:xfrm>
+          <a:prstGeom prst="rect">
+            <a:avLst/>
+          </a:prstGeom>
+        </p:spPr>
+      </p:pic>
     </p:spTree>
   </p:cSld>
   <p:clrMapOvr>
@@ -4879,8 +4975,8 @@
         </p:nvSpPr>
         <p:spPr>
           <a:xfrm>
-            <a:off x="640080" y="685800"/>
-            <a:ext cx="10972800" cy="1463040"/>
+            <a:off x="640080" y="658368"/>
+            <a:ext cx="10972800" cy="1645920"/>
           </a:xfrm>
           <a:prstGeom prst="rect">
             <a:avLst/>
@@ -4894,7 +4990,7 @@
           <a:lstStyle/>
           <a:p>
             <a:r>
-              <a:rPr sz="3200" b="1">
+              <a:rPr sz="3000" b="1">
                 <a:solidFill>
                   <a:srgbClr val="FFFFFF"/>
                 </a:solidFill>
@@ -5096,8 +5192,8 @@
         </p:nvSpPr>
         <p:spPr>
           <a:xfrm>
-            <a:off x="640080" y="685800"/>
-            <a:ext cx="10972800" cy="1463040"/>
+            <a:off x="640080" y="658368"/>
+            <a:ext cx="7863840" cy="1645920"/>
           </a:xfrm>
           <a:prstGeom prst="rect">
             <a:avLst/>
@@ -5111,7 +5207,7 @@
           <a:lstStyle/>
           <a:p>
             <a:r>
-              <a:rPr sz="3200" b="1">
+              <a:rPr sz="3000" b="1">
                 <a:solidFill>
                   <a:srgbClr val="FFFFFF"/>
                 </a:solidFill>
@@ -5130,8 +5226,8 @@
         </p:nvSpPr>
         <p:spPr>
           <a:xfrm>
-            <a:off x="777240" y="2286000"/>
-            <a:ext cx="10607040" cy="4754880"/>
+            <a:off x="777240" y="2331720"/>
+            <a:ext cx="7498079" cy="4754880"/>
           </a:xfrm>
           <a:prstGeom prst="rect">
             <a:avLst/>
@@ -5150,7 +5246,7 @@
               </a:spcAft>
             </a:pPr>
             <a:r>
-              <a:rPr sz="2400" b="0">
+              <a:rPr sz="2200" b="0">
                 <a:solidFill>
                   <a:srgbClr val="FFFFFF"/>
                 </a:solidFill>
@@ -5166,7 +5262,7 @@
               </a:spcAft>
             </a:pPr>
             <a:r>
-              <a:rPr sz="2400" b="0">
+              <a:rPr sz="2200" b="0">
                 <a:solidFill>
                   <a:srgbClr val="FFFFFF"/>
                 </a:solidFill>
@@ -5182,7 +5278,7 @@
               </a:spcAft>
             </a:pPr>
             <a:r>
-              <a:rPr sz="2400" b="0">
+              <a:rPr sz="2200" b="0">
                 <a:solidFill>
                   <a:srgbClr val="FFFFFF"/>
                 </a:solidFill>
@@ -5193,6 +5289,30 @@
           </a:p>
         </p:txBody>
       </p:sp>
+      <p:pic>
+        <p:nvPicPr>
+          <p:cNvPr id="6" name="Picture 5" descr="dw-joins.jpg"/>
+          <p:cNvPicPr>
+            <a:picLocks noChangeAspect="1"/>
+          </p:cNvPicPr>
+          <p:nvPr/>
+        </p:nvPicPr>
+        <p:blipFill>
+          <a:blip r:embed="rId2"/>
+          <a:stretch>
+            <a:fillRect/>
+          </a:stretch>
+        </p:blipFill>
+        <p:spPr>
+          <a:xfrm>
+            <a:off x="8732520" y="2057400"/>
+            <a:ext cx="2880360" cy="2880360"/>
+          </a:xfrm>
+          <a:prstGeom prst="rect">
+            <a:avLst/>
+          </a:prstGeom>
+        </p:spPr>
+      </p:pic>
     </p:spTree>
   </p:cSld>
   <p:clrMapOvr>
@@ -5296,8 +5416,8 @@
         </p:nvSpPr>
         <p:spPr>
           <a:xfrm>
-            <a:off x="640080" y="685800"/>
-            <a:ext cx="10972800" cy="1463040"/>
+            <a:off x="640080" y="658368"/>
+            <a:ext cx="7863840" cy="1645920"/>
           </a:xfrm>
           <a:prstGeom prst="rect">
             <a:avLst/>
@@ -5311,7 +5431,7 @@
           <a:lstStyle/>
           <a:p>
             <a:r>
-              <a:rPr sz="3200" b="1">
+              <a:rPr sz="3000" b="1">
                 <a:solidFill>
                   <a:srgbClr val="FFFFFF"/>
                 </a:solidFill>
@@ -5330,8 +5450,8 @@
         </p:nvSpPr>
         <p:spPr>
           <a:xfrm>
-            <a:off x="777240" y="2286000"/>
-            <a:ext cx="10607040" cy="4754880"/>
+            <a:off x="777240" y="2331720"/>
+            <a:ext cx="7498079" cy="4754880"/>
           </a:xfrm>
           <a:prstGeom prst="rect">
             <a:avLst/>
@@ -5350,7 +5470,7 @@
               </a:spcAft>
             </a:pPr>
             <a:r>
-              <a:rPr sz="2400" b="0">
+              <a:rPr sz="2200" b="0">
                 <a:solidFill>
                   <a:srgbClr val="FFFFFF"/>
                 </a:solidFill>
@@ -5366,7 +5486,7 @@
               </a:spcAft>
             </a:pPr>
             <a:r>
-              <a:rPr sz="2400" b="0">
+              <a:rPr sz="2200" b="0">
                 <a:solidFill>
                   <a:srgbClr val="FFFFFF"/>
                 </a:solidFill>
@@ -5377,6 +5497,30 @@
           </a:p>
         </p:txBody>
       </p:sp>
+      <p:pic>
+        <p:nvPicPr>
+          <p:cNvPr id="6" name="Picture 5" descr="dw-joins.jpg"/>
+          <p:cNvPicPr>
+            <a:picLocks noChangeAspect="1"/>
+          </p:cNvPicPr>
+          <p:nvPr/>
+        </p:nvPicPr>
+        <p:blipFill>
+          <a:blip r:embed="rId2"/>
+          <a:stretch>
+            <a:fillRect/>
+          </a:stretch>
+        </p:blipFill>
+        <p:spPr>
+          <a:xfrm>
+            <a:off x="8732520" y="2057400"/>
+            <a:ext cx="2880360" cy="2880360"/>
+          </a:xfrm>
+          <a:prstGeom prst="rect">
+            <a:avLst/>
+          </a:prstGeom>
+        </p:spPr>
+      </p:pic>
     </p:spTree>
   </p:cSld>
   <p:clrMapOvr>
@@ -5480,8 +5624,8 @@
         </p:nvSpPr>
         <p:spPr>
           <a:xfrm>
-            <a:off x="640080" y="685800"/>
-            <a:ext cx="10972800" cy="1463040"/>
+            <a:off x="640080" y="658368"/>
+            <a:ext cx="10972800" cy="1645920"/>
           </a:xfrm>
           <a:prstGeom prst="rect">
             <a:avLst/>
@@ -5495,7 +5639,7 @@
           <a:lstStyle/>
           <a:p>
             <a:r>
-              <a:rPr sz="3200" b="1">
+              <a:rPr sz="3000" b="1">
                 <a:solidFill>
                   <a:srgbClr val="FFFFFF"/>
                 </a:solidFill>
@@ -5793,8 +5937,8 @@
         </p:nvSpPr>
         <p:spPr>
           <a:xfrm>
-            <a:off x="640080" y="685800"/>
-            <a:ext cx="10972800" cy="1463040"/>
+            <a:off x="640080" y="658368"/>
+            <a:ext cx="7863840" cy="1645920"/>
           </a:xfrm>
           <a:prstGeom prst="rect">
             <a:avLst/>
@@ -5808,7 +5952,7 @@
           <a:lstStyle/>
           <a:p>
             <a:r>
-              <a:rPr sz="3200" b="1">
+              <a:rPr sz="3000" b="1">
                 <a:solidFill>
                   <a:srgbClr val="FFFFFF"/>
                 </a:solidFill>
@@ -5827,8 +5971,8 @@
         </p:nvSpPr>
         <p:spPr>
           <a:xfrm>
-            <a:off x="777240" y="2286000"/>
-            <a:ext cx="10607040" cy="4754880"/>
+            <a:off x="777240" y="2331720"/>
+            <a:ext cx="7498079" cy="4754880"/>
           </a:xfrm>
           <a:prstGeom prst="rect">
             <a:avLst/>
@@ -5847,7 +5991,7 @@
               </a:spcAft>
             </a:pPr>
             <a:r>
-              <a:rPr sz="2400" b="0">
+              <a:rPr sz="2200" b="0">
                 <a:solidFill>
                   <a:srgbClr val="FFFFFF"/>
                 </a:solidFill>
@@ -5858,6 +6002,30 @@
           </a:p>
         </p:txBody>
       </p:sp>
+      <p:pic>
+        <p:nvPicPr>
+          <p:cNvPr id="6" name="Picture 5" descr="dw-joins.jpg"/>
+          <p:cNvPicPr>
+            <a:picLocks noChangeAspect="1"/>
+          </p:cNvPicPr>
+          <p:nvPr/>
+        </p:nvPicPr>
+        <p:blipFill>
+          <a:blip r:embed="rId2"/>
+          <a:stretch>
+            <a:fillRect/>
+          </a:stretch>
+        </p:blipFill>
+        <p:spPr>
+          <a:xfrm>
+            <a:off x="8732520" y="2057400"/>
+            <a:ext cx="2880360" cy="2880360"/>
+          </a:xfrm>
+          <a:prstGeom prst="rect">
+            <a:avLst/>
+          </a:prstGeom>
+        </p:spPr>
+      </p:pic>
     </p:spTree>
   </p:cSld>
   <p:clrMapOvr>
@@ -5961,8 +6129,8 @@
         </p:nvSpPr>
         <p:spPr>
           <a:xfrm>
-            <a:off x="640080" y="685800"/>
-            <a:ext cx="10972800" cy="1463040"/>
+            <a:off x="640080" y="658368"/>
+            <a:ext cx="10972800" cy="1645920"/>
           </a:xfrm>
           <a:prstGeom prst="rect">
             <a:avLst/>
@@ -5976,7 +6144,7 @@
           <a:lstStyle/>
           <a:p>
             <a:r>
-              <a:rPr sz="3200" b="1">
+              <a:rPr sz="3000" b="1">
                 <a:solidFill>
                   <a:srgbClr val="FFFFFF"/>
                 </a:solidFill>
